--- a/defensive-publications/openbanking-evolution.pptx
+++ b/defensive-publications/openbanking-evolution.pptx
@@ -3731,8 +3731,11 @@
           </a:prstGeom>
           <a:gradFill flip="none" rotWithShape="1">
             <a:gsLst>
-              <a:gs pos="54000">
-                <a:srgbClr val="FFE0FF"/>
+              <a:gs pos="47000">
+                <a:schemeClr val="accent6">
+                  <a:lumMod val="20000"/>
+                  <a:lumOff val="80000"/>
+                </a:schemeClr>
               </a:gs>
               <a:gs pos="0">
                 <a:schemeClr val="accent3">
@@ -3741,7 +3744,7 @@
                 </a:schemeClr>
               </a:gs>
               <a:gs pos="100000">
-                <a:srgbClr val="EAB3EF"/>
+                <a:srgbClr val="BBEBAE"/>
               </a:gs>
             </a:gsLst>
             <a:path path="circle">
@@ -4233,22 +4236,10 @@
             </a:prstGeom>
             <a:gradFill flip="none" rotWithShape="1">
               <a:gsLst>
-                <a:gs pos="0">
+                <a:gs pos="1000">
                   <a:schemeClr val="accent1">
                     <a:lumMod val="5000"/>
                     <a:lumOff val="95000"/>
-                  </a:schemeClr>
-                </a:gs>
-                <a:gs pos="74000">
-                  <a:schemeClr val="accent1">
-                    <a:lumMod val="45000"/>
-                    <a:lumOff val="55000"/>
-                  </a:schemeClr>
-                </a:gs>
-                <a:gs pos="83000">
-                  <a:schemeClr val="accent1">
-                    <a:lumMod val="45000"/>
-                    <a:lumOff val="55000"/>
                   </a:schemeClr>
                 </a:gs>
                 <a:gs pos="100000">
@@ -4258,7 +4249,9 @@
                   </a:schemeClr>
                 </a:gs>
               </a:gsLst>
-              <a:lin ang="2700000" scaled="1"/>
+              <a:path path="circle">
+                <a:fillToRect l="50000" t="50000" r="50000" b="50000"/>
+              </a:path>
               <a:tileRect/>
             </a:gradFill>
             <a:effectLst>
@@ -4317,31 +4310,18 @@
             <a:gradFill flip="none" rotWithShape="1">
               <a:gsLst>
                 <a:gs pos="0">
-                  <a:schemeClr val="accent6">
-                    <a:lumMod val="5000"/>
-                    <a:lumOff val="95000"/>
-                  </a:schemeClr>
-                </a:gs>
-                <a:gs pos="74000">
-                  <a:schemeClr val="accent6">
-                    <a:lumMod val="45000"/>
-                    <a:lumOff val="55000"/>
-                  </a:schemeClr>
-                </a:gs>
-                <a:gs pos="83000">
-                  <a:schemeClr val="accent6">
-                    <a:lumMod val="45000"/>
-                    <a:lumOff val="55000"/>
-                  </a:schemeClr>
+                  <a:schemeClr val="bg1"/>
                 </a:gs>
                 <a:gs pos="100000">
                   <a:schemeClr val="accent6">
-                    <a:lumMod val="30000"/>
-                    <a:lumOff val="70000"/>
+                    <a:lumMod val="60000"/>
+                    <a:lumOff val="40000"/>
                   </a:schemeClr>
                 </a:gs>
               </a:gsLst>
-              <a:lin ang="2700000" scaled="1"/>
+              <a:path path="circle">
+                <a:fillToRect l="50000" t="50000" r="50000" b="50000"/>
+              </a:path>
               <a:tileRect/>
             </a:gradFill>
             <a:effectLst>
@@ -5960,8 +5940,11 @@
           </a:prstGeom>
           <a:gradFill flip="none" rotWithShape="1">
             <a:gsLst>
-              <a:gs pos="54000">
-                <a:srgbClr val="FFE0FF"/>
+              <a:gs pos="47000">
+                <a:schemeClr val="accent6">
+                  <a:lumMod val="20000"/>
+                  <a:lumOff val="80000"/>
+                </a:schemeClr>
               </a:gs>
               <a:gs pos="0">
                 <a:schemeClr val="accent3">
@@ -5970,7 +5953,7 @@
                 </a:schemeClr>
               </a:gs>
               <a:gs pos="100000">
-                <a:srgbClr val="EAB3EF"/>
+                <a:srgbClr val="BBEBAE"/>
               </a:gs>
             </a:gsLst>
             <a:path path="circle">
